--- a/presentations/research-ttm-servicenow-sailpoint/Research_TTM_ServiceNow_SailPoint_Narrated.pptx
+++ b/presentations/research-ttm-servicenow-sailpoint/Research_TTM_ServiceNow_SailPoint_Narrated.pptx
@@ -193,7 +193,7 @@
     </p:spTree>
     <p:extLst>
       <p:ext uri="{BB962C8B-B14F-4D97-AF65-F5344CB8AC3E}">
-        <p14:creationId xmlns:p14="http://schemas.microsoft.com/office/powerpoint/2010/main" val="1336536687"/>
+        <p14:creationId xmlns:p14="http://schemas.microsoft.com/office/powerpoint/2010/main" val="2490104391"/>
       </p:ext>
     </p:extLst>
   </p:cSld>
@@ -2392,7 +2392,7 @@
             <a:hlinkClick r:id="" action="ppaction://media"/>
             <a:extLst>
               <a:ext uri="{FF2B5EF4-FFF2-40B4-BE49-F238E27FC236}">
-                <a16:creationId xmlns:a16="http://schemas.microsoft.com/office/drawing/2014/main" id="{58BCFEF5-8D82-489C-69ED-01C2A254F370}"/>
+                <a16:creationId xmlns:a16="http://schemas.microsoft.com/office/drawing/2014/main" id="{86A56055-1D25-3732-4D2F-DEF7C74193B1}"/>
               </a:ext>
             </a:extLst>
           </p:cNvPr>
@@ -2408,7 +2408,7 @@
                     <p:ext uri="{3AFAAA56-56D3-431D-BCD4-E75A35582382}">
                       <p173:tracksInfo xmlns:p173="http://schemas.microsoft.com/office/powerpoint/2017/3/main" displayLoc="slide">
                         <p173:trackLst>
-                          <p173:track id="{C481C2ED-A9D5-4265-8A83-B247184A0CED}" label="English (captions)" lang="en-US" r:embed="rId6"/>
+                          <p173:track id="{24A7BBF6-CA33-432B-80C2-D9E2BF349980}" label="English (captions)" lang="en-US" r:embed="rId6"/>
                         </p173:trackLst>
                       </p173:tracksInfo>
                     </p:ext>
@@ -2426,7 +2426,7 @@
         </p:blipFill>
         <p:spPr>
           <a:xfrm>
-            <a:off x="127000" y="6350000"/>
+            <a:off x="12446000" y="127000"/>
             <a:ext cx="304800" cy="304800"/>
           </a:xfrm>
           <a:prstGeom prst="rect">
@@ -4500,7 +4500,7 @@
             <a:hlinkClick r:id="" action="ppaction://media"/>
             <a:extLst>
               <a:ext uri="{FF2B5EF4-FFF2-40B4-BE49-F238E27FC236}">
-                <a16:creationId xmlns:a16="http://schemas.microsoft.com/office/drawing/2014/main" id="{5B13941E-290E-C796-12D6-50F3EDF4D0BF}"/>
+                <a16:creationId xmlns:a16="http://schemas.microsoft.com/office/drawing/2014/main" id="{EEAB9B08-5300-D97B-8364-4A497578AF4F}"/>
               </a:ext>
             </a:extLst>
           </p:cNvPr>
@@ -4516,7 +4516,7 @@
                     <p:ext uri="{3AFAAA56-56D3-431D-BCD4-E75A35582382}">
                       <p173:tracksInfo xmlns:p173="http://schemas.microsoft.com/office/powerpoint/2017/3/main" displayLoc="slide">
                         <p173:trackLst>
-                          <p173:track id="{F2A317D8-CF18-4932-86E1-E84BE48A8F60}" label="English (captions)" lang="en-US" r:embed="rId6"/>
+                          <p173:track id="{C3BD5C8B-25F1-4933-B627-FEE70F367EB2}" label="English (captions)" lang="en-US" r:embed="rId6"/>
                         </p173:trackLst>
                       </p173:tracksInfo>
                     </p:ext>
@@ -4534,7 +4534,7 @@
         </p:blipFill>
         <p:spPr>
           <a:xfrm>
-            <a:off x="127000" y="6350000"/>
+            <a:off x="12446000" y="127000"/>
             <a:ext cx="304800" cy="304800"/>
           </a:xfrm>
           <a:prstGeom prst="rect">
@@ -6887,7 +6887,7 @@
             <a:hlinkClick r:id="" action="ppaction://media"/>
             <a:extLst>
               <a:ext uri="{FF2B5EF4-FFF2-40B4-BE49-F238E27FC236}">
-                <a16:creationId xmlns:a16="http://schemas.microsoft.com/office/drawing/2014/main" id="{975C0718-7CBB-E236-EF05-7C17F8E0A861}"/>
+                <a16:creationId xmlns:a16="http://schemas.microsoft.com/office/drawing/2014/main" id="{72DF120D-2383-B45A-924B-683188006B09}"/>
               </a:ext>
             </a:extLst>
           </p:cNvPr>
@@ -6903,7 +6903,7 @@
                     <p:ext uri="{3AFAAA56-56D3-431D-BCD4-E75A35582382}">
                       <p173:tracksInfo xmlns:p173="http://schemas.microsoft.com/office/powerpoint/2017/3/main" displayLoc="slide">
                         <p173:trackLst>
-                          <p173:track id="{AA746E34-B4BD-4BB0-A88C-3707594D3B67}" label="English (captions)" lang="en-US" r:embed="rId6"/>
+                          <p173:track id="{297E7162-02FB-4434-B0C6-4CE2C77CE534}" label="English (captions)" lang="en-US" r:embed="rId6"/>
                         </p173:trackLst>
                       </p173:tracksInfo>
                     </p:ext>
@@ -6921,7 +6921,7 @@
         </p:blipFill>
         <p:spPr>
           <a:xfrm>
-            <a:off x="127000" y="6350000"/>
+            <a:off x="12446000" y="127000"/>
             <a:ext cx="304800" cy="304800"/>
           </a:xfrm>
           <a:prstGeom prst="rect">
@@ -8854,7 +8854,7 @@
             <a:hlinkClick r:id="" action="ppaction://media"/>
             <a:extLst>
               <a:ext uri="{FF2B5EF4-FFF2-40B4-BE49-F238E27FC236}">
-                <a16:creationId xmlns:a16="http://schemas.microsoft.com/office/drawing/2014/main" id="{DD164922-E43E-9B03-A2A7-28F949FB8BDA}"/>
+                <a16:creationId xmlns:a16="http://schemas.microsoft.com/office/drawing/2014/main" id="{9BBD8E44-98B5-68CA-1A1A-13D88077CC77}"/>
               </a:ext>
             </a:extLst>
           </p:cNvPr>
@@ -8870,7 +8870,7 @@
                     <p:ext uri="{3AFAAA56-56D3-431D-BCD4-E75A35582382}">
                       <p173:tracksInfo xmlns:p173="http://schemas.microsoft.com/office/powerpoint/2017/3/main" displayLoc="slide">
                         <p173:trackLst>
-                          <p173:track id="{6AB81C73-40D6-443A-905F-F964D7A8E1B1}" label="English (captions)" lang="en-US" r:embed="rId6"/>
+                          <p173:track id="{91673AF2-20A0-459A-A2D3-B872E74417C1}" label="English (captions)" lang="en-US" r:embed="rId6"/>
                         </p173:trackLst>
                       </p173:tracksInfo>
                     </p:ext>
@@ -8888,7 +8888,7 @@
         </p:blipFill>
         <p:spPr>
           <a:xfrm>
-            <a:off x="127000" y="6350000"/>
+            <a:off x="12446000" y="127000"/>
             <a:ext cx="304800" cy="304800"/>
           </a:xfrm>
           <a:prstGeom prst="rect">
@@ -9884,7 +9884,7 @@
             <a:hlinkClick r:id="" action="ppaction://media"/>
             <a:extLst>
               <a:ext uri="{FF2B5EF4-FFF2-40B4-BE49-F238E27FC236}">
-                <a16:creationId xmlns:a16="http://schemas.microsoft.com/office/drawing/2014/main" id="{DD08DA82-A9AE-ABDF-DBF0-CCC16F2AB324}"/>
+                <a16:creationId xmlns:a16="http://schemas.microsoft.com/office/drawing/2014/main" id="{44965A21-5C2D-0322-C7FC-AD64377485C6}"/>
               </a:ext>
             </a:extLst>
           </p:cNvPr>
@@ -9900,7 +9900,7 @@
                     <p:ext uri="{3AFAAA56-56D3-431D-BCD4-E75A35582382}">
                       <p173:tracksInfo xmlns:p173="http://schemas.microsoft.com/office/powerpoint/2017/3/main" displayLoc="slide">
                         <p173:trackLst>
-                          <p173:track id="{5E284680-D803-4052-8F36-BF599AE255F8}" label="English (captions)" lang="en-US" r:embed="rId7"/>
+                          <p173:track id="{B8D81265-5280-430C-9E23-0FB7B14AE552}" label="English (captions)" lang="en-US" r:embed="rId7"/>
                         </p173:trackLst>
                       </p173:tracksInfo>
                     </p:ext>
@@ -9918,7 +9918,7 @@
         </p:blipFill>
         <p:spPr>
           <a:xfrm>
-            <a:off x="127000" y="6350000"/>
+            <a:off x="12446000" y="127000"/>
             <a:ext cx="304800" cy="304800"/>
           </a:xfrm>
           <a:prstGeom prst="rect">
@@ -11243,7 +11243,7 @@
             <a:hlinkClick r:id="" action="ppaction://media"/>
             <a:extLst>
               <a:ext uri="{FF2B5EF4-FFF2-40B4-BE49-F238E27FC236}">
-                <a16:creationId xmlns:a16="http://schemas.microsoft.com/office/drawing/2014/main" id="{1638CB9F-F18E-7AE4-7567-6F42A671E5A7}"/>
+                <a16:creationId xmlns:a16="http://schemas.microsoft.com/office/drawing/2014/main" id="{0D9B8FA8-F2E3-AEA1-CE5C-907006ADDB78}"/>
               </a:ext>
             </a:extLst>
           </p:cNvPr>
@@ -11259,7 +11259,7 @@
                     <p:ext uri="{3AFAAA56-56D3-431D-BCD4-E75A35582382}">
                       <p173:tracksInfo xmlns:p173="http://schemas.microsoft.com/office/powerpoint/2017/3/main" displayLoc="slide">
                         <p173:trackLst>
-                          <p173:track id="{55861731-2F1C-451B-AC95-4F99C66ACE9C}" label="English (captions)" lang="en-US" r:embed="rId7"/>
+                          <p173:track id="{0179CBD8-4C45-4504-B019-DC106C216A1F}" label="English (captions)" lang="en-US" r:embed="rId7"/>
                         </p173:trackLst>
                       </p173:tracksInfo>
                     </p:ext>
@@ -11277,7 +11277,7 @@
         </p:blipFill>
         <p:spPr>
           <a:xfrm>
-            <a:off x="127000" y="6350000"/>
+            <a:off x="12446000" y="127000"/>
             <a:ext cx="304800" cy="304800"/>
           </a:xfrm>
           <a:prstGeom prst="rect">
@@ -12961,7 +12961,7 @@
             <a:hlinkClick r:id="" action="ppaction://media"/>
             <a:extLst>
               <a:ext uri="{FF2B5EF4-FFF2-40B4-BE49-F238E27FC236}">
-                <a16:creationId xmlns:a16="http://schemas.microsoft.com/office/drawing/2014/main" id="{87C55302-C3B6-A9AC-43FE-DAE0E82FAE78}"/>
+                <a16:creationId xmlns:a16="http://schemas.microsoft.com/office/drawing/2014/main" id="{6FABA734-7FEA-1121-3D73-4D9C3D849E55}"/>
               </a:ext>
             </a:extLst>
           </p:cNvPr>
@@ -12977,7 +12977,7 @@
                     <p:ext uri="{3AFAAA56-56D3-431D-BCD4-E75A35582382}">
                       <p173:tracksInfo xmlns:p173="http://schemas.microsoft.com/office/powerpoint/2017/3/main" displayLoc="slide">
                         <p173:trackLst>
-                          <p173:track id="{365FFD03-AB59-4FC8-8E40-223237E35EBC}" label="English (captions)" lang="en-US" r:embed="rId7"/>
+                          <p173:track id="{37ECAFE5-7538-4B70-9318-C6F3425820D5}" label="English (captions)" lang="en-US" r:embed="rId7"/>
                         </p173:trackLst>
                       </p173:tracksInfo>
                     </p:ext>
@@ -12995,7 +12995,7 @@
         </p:blipFill>
         <p:spPr>
           <a:xfrm>
-            <a:off x="127000" y="6350000"/>
+            <a:off x="12446000" y="127000"/>
             <a:ext cx="304800" cy="304800"/>
           </a:xfrm>
           <a:prstGeom prst="rect">
@@ -13699,7 +13699,7 @@
             <a:hlinkClick r:id="" action="ppaction://media"/>
             <a:extLst>
               <a:ext uri="{FF2B5EF4-FFF2-40B4-BE49-F238E27FC236}">
-                <a16:creationId xmlns:a16="http://schemas.microsoft.com/office/drawing/2014/main" id="{6F982E36-549D-5CFE-47D1-3FCF52829E1E}"/>
+                <a16:creationId xmlns:a16="http://schemas.microsoft.com/office/drawing/2014/main" id="{435C38AB-3978-C6AA-0EF2-F485B136718E}"/>
               </a:ext>
             </a:extLst>
           </p:cNvPr>
@@ -13715,7 +13715,7 @@
                     <p:ext uri="{3AFAAA56-56D3-431D-BCD4-E75A35582382}">
                       <p173:tracksInfo xmlns:p173="http://schemas.microsoft.com/office/powerpoint/2017/3/main" displayLoc="slide">
                         <p173:trackLst>
-                          <p173:track id="{BE35FEEF-5041-422C-904A-5EA3B803945A}" label="English (captions)" lang="en-US" r:embed="rId7"/>
+                          <p173:track id="{78BA3B7E-E685-4413-A90D-A56BF5555C57}" label="English (captions)" lang="en-US" r:embed="rId7"/>
                         </p173:trackLst>
                       </p173:tracksInfo>
                     </p:ext>
@@ -13733,7 +13733,7 @@
         </p:blipFill>
         <p:spPr>
           <a:xfrm>
-            <a:off x="127000" y="6350000"/>
+            <a:off x="12446000" y="127000"/>
             <a:ext cx="304800" cy="304800"/>
           </a:xfrm>
           <a:prstGeom prst="rect">
@@ -15637,7 +15637,7 @@
             <a:hlinkClick r:id="" action="ppaction://media"/>
             <a:extLst>
               <a:ext uri="{FF2B5EF4-FFF2-40B4-BE49-F238E27FC236}">
-                <a16:creationId xmlns:a16="http://schemas.microsoft.com/office/drawing/2014/main" id="{9C5FFE91-2EE8-CA31-79B2-15BEE4DB2992}"/>
+                <a16:creationId xmlns:a16="http://schemas.microsoft.com/office/drawing/2014/main" id="{E1249FF7-50FB-B753-E946-948DB085B930}"/>
               </a:ext>
             </a:extLst>
           </p:cNvPr>
@@ -15653,7 +15653,7 @@
                     <p:ext uri="{3AFAAA56-56D3-431D-BCD4-E75A35582382}">
                       <p173:tracksInfo xmlns:p173="http://schemas.microsoft.com/office/powerpoint/2017/3/main" displayLoc="slide">
                         <p173:trackLst>
-                          <p173:track id="{C5EB34BF-3FD4-4C6C-8A3C-963E4D353144}" label="English (captions)" lang="en-US" r:embed="rId7"/>
+                          <p173:track id="{940FE3ED-8A02-448D-8DD1-AB04772D78A8}" label="English (captions)" lang="en-US" r:embed="rId7"/>
                         </p173:trackLst>
                       </p173:tracksInfo>
                     </p:ext>
@@ -15671,7 +15671,7 @@
         </p:blipFill>
         <p:spPr>
           <a:xfrm>
-            <a:off x="127000" y="6350000"/>
+            <a:off x="12446000" y="127000"/>
             <a:ext cx="304800" cy="304800"/>
           </a:xfrm>
           <a:prstGeom prst="rect">
@@ -17854,7 +17854,7 @@
             <a:hlinkClick r:id="" action="ppaction://media"/>
             <a:extLst>
               <a:ext uri="{FF2B5EF4-FFF2-40B4-BE49-F238E27FC236}">
-                <a16:creationId xmlns:a16="http://schemas.microsoft.com/office/drawing/2014/main" id="{6E3E2415-C30C-86F1-54D2-97748DAEFF5D}"/>
+                <a16:creationId xmlns:a16="http://schemas.microsoft.com/office/drawing/2014/main" id="{EB49EC5C-0F13-4131-FE5C-5D27B9D61BD2}"/>
               </a:ext>
             </a:extLst>
           </p:cNvPr>
@@ -17870,7 +17870,7 @@
                     <p:ext uri="{3AFAAA56-56D3-431D-BCD4-E75A35582382}">
                       <p173:tracksInfo xmlns:p173="http://schemas.microsoft.com/office/powerpoint/2017/3/main" displayLoc="slide">
                         <p173:trackLst>
-                          <p173:track id="{53D86B60-C14C-42BB-826A-BE0F5C7AF07D}" label="English (captions)" lang="en-US" r:embed="rId7"/>
+                          <p173:track id="{C904785F-0362-4C39-866C-1B98D9E094C1}" label="English (captions)" lang="en-US" r:embed="rId7"/>
                         </p173:trackLst>
                       </p173:tracksInfo>
                     </p:ext>
@@ -17888,7 +17888,7 @@
         </p:blipFill>
         <p:spPr>
           <a:xfrm>
-            <a:off x="127000" y="6350000"/>
+            <a:off x="12446000" y="127000"/>
             <a:ext cx="304800" cy="304800"/>
           </a:xfrm>
           <a:prstGeom prst="rect">
@@ -20241,7 +20241,7 @@
             <a:hlinkClick r:id="" action="ppaction://media"/>
             <a:extLst>
               <a:ext uri="{FF2B5EF4-FFF2-40B4-BE49-F238E27FC236}">
-                <a16:creationId xmlns:a16="http://schemas.microsoft.com/office/drawing/2014/main" id="{01161C72-7C01-A43E-EF42-454EB0C12C62}"/>
+                <a16:creationId xmlns:a16="http://schemas.microsoft.com/office/drawing/2014/main" id="{2987578E-2094-0295-9DA7-4F69FC4FD640}"/>
               </a:ext>
             </a:extLst>
           </p:cNvPr>
@@ -20257,7 +20257,7 @@
                     <p:ext uri="{3AFAAA56-56D3-431D-BCD4-E75A35582382}">
                       <p173:tracksInfo xmlns:p173="http://schemas.microsoft.com/office/powerpoint/2017/3/main" displayLoc="slide">
                         <p173:trackLst>
-                          <p173:track id="{6D662EAD-8DE4-45C3-9C11-B29766B9C9E8}" label="English (captions)" lang="en-US" r:embed="rId6"/>
+                          <p173:track id="{2C9282B4-D44E-494D-8615-F7D244DBB97D}" label="English (captions)" lang="en-US" r:embed="rId6"/>
                         </p173:trackLst>
                       </p173:tracksInfo>
                     </p:ext>
@@ -20275,7 +20275,7 @@
         </p:blipFill>
         <p:spPr>
           <a:xfrm>
-            <a:off x="127000" y="6350000"/>
+            <a:off x="12446000" y="127000"/>
             <a:ext cx="304800" cy="304800"/>
           </a:xfrm>
           <a:prstGeom prst="rect">
@@ -21066,7 +21066,7 @@
             <a:hlinkClick r:id="" action="ppaction://media"/>
             <a:extLst>
               <a:ext uri="{FF2B5EF4-FFF2-40B4-BE49-F238E27FC236}">
-                <a16:creationId xmlns:a16="http://schemas.microsoft.com/office/drawing/2014/main" id="{18B28051-4C91-2CD0-2565-BCAF4BA0DB31}"/>
+                <a16:creationId xmlns:a16="http://schemas.microsoft.com/office/drawing/2014/main" id="{4ED1780C-3C66-D507-46AE-61140C9CB399}"/>
               </a:ext>
             </a:extLst>
           </p:cNvPr>
@@ -21082,7 +21082,7 @@
                     <p:ext uri="{3AFAAA56-56D3-431D-BCD4-E75A35582382}">
                       <p173:tracksInfo xmlns:p173="http://schemas.microsoft.com/office/powerpoint/2017/3/main" displayLoc="slide">
                         <p173:trackLst>
-                          <p173:track id="{7AA79AEB-5807-443C-BA3A-CD8B80975B9D}" label="English (captions)" lang="en-US" r:embed="rId7"/>
+                          <p173:track id="{F88C8A7E-8503-405B-BDB5-1E7AE63AC138}" label="English (captions)" lang="en-US" r:embed="rId7"/>
                         </p173:trackLst>
                       </p173:tracksInfo>
                     </p:ext>
@@ -21100,7 +21100,7 @@
         </p:blipFill>
         <p:spPr>
           <a:xfrm>
-            <a:off x="127000" y="6350000"/>
+            <a:off x="12446000" y="127000"/>
             <a:ext cx="304800" cy="304800"/>
           </a:xfrm>
           <a:prstGeom prst="rect">
@@ -21909,7 +21909,7 @@
             <a:hlinkClick r:id="" action="ppaction://media"/>
             <a:extLst>
               <a:ext uri="{FF2B5EF4-FFF2-40B4-BE49-F238E27FC236}">
-                <a16:creationId xmlns:a16="http://schemas.microsoft.com/office/drawing/2014/main" id="{F8D5EDB7-EE5E-95EC-86EE-0FFB302B0E7E}"/>
+                <a16:creationId xmlns:a16="http://schemas.microsoft.com/office/drawing/2014/main" id="{205A73BC-FF53-C181-9DA0-DEB0B9DC8470}"/>
               </a:ext>
             </a:extLst>
           </p:cNvPr>
@@ -21925,7 +21925,7 @@
                     <p:ext uri="{3AFAAA56-56D3-431D-BCD4-E75A35582382}">
                       <p173:tracksInfo xmlns:p173="http://schemas.microsoft.com/office/powerpoint/2017/3/main" displayLoc="slide">
                         <p173:trackLst>
-                          <p173:track id="{E2DC27F0-0EF3-4F19-BBED-D4516810D270}" label="English (captions)" lang="en-US" r:embed="rId7"/>
+                          <p173:track id="{545FE66A-C773-4FEF-8FC3-11ADBAF94841}" label="English (captions)" lang="en-US" r:embed="rId7"/>
                         </p173:trackLst>
                       </p173:tracksInfo>
                     </p:ext>
@@ -21943,7 +21943,7 @@
         </p:blipFill>
         <p:spPr>
           <a:xfrm>
-            <a:off x="127000" y="6350000"/>
+            <a:off x="12446000" y="127000"/>
             <a:ext cx="304800" cy="304800"/>
           </a:xfrm>
           <a:prstGeom prst="rect">
